--- a/system-design-101/vi/lessons/sd-07-017/slides/sd-07-017.pptx
+++ b/system-design-101/vi/lessons/sd-07-017/slides/sd-07-017.pptx
@@ -8379,29 +8379,62 @@
               <a:buNone/>
             </a:pPr>
             <a:r>
-              <a:rPr lang="en-US" sz="1950" dirty="0" spc="-10" kern="0">
-                <a:solidFill>
-                  <a:srgbClr val="F3EEE3"/>
-                </a:solidFill>
-                <a:latin typeface="Be Vietnam Pro" pitchFamily="34" charset="0"/>
-                <a:ea typeface="Be Vietnam Pro" pitchFamily="34" charset="-122"/>
-                <a:cs typeface="Be Vietnam Pro" pitchFamily="34" charset="-120"/>
-              </a:rPr>
-              <a:t>Chuyển</a:t>
-            </a:r>
-            <a:r>
-              <a:rPr lang="en-US" sz="1950" dirty="0" spc="-1" kern="0">
-                <a:solidFill>
-                  <a:srgbClr val="F3EEE3"/>
-                </a:solidFill>
-                <a:latin typeface="Be Vietnam Pro" pitchFamily="34" charset="0"/>
-                <a:ea typeface="Be Vietnam Pro" pitchFamily="34" charset="-122"/>
-                <a:cs typeface="Be Vietnam Pro" pitchFamily="34" charset="-120"/>
-              </a:rPr>
-              <a:t> mã</a:t>
-            </a:r>
-            <a:r>
-              <a:rPr lang="en-US" sz="1950" dirty="0" spc="-21" kern="0">
+              <a:rPr lang="en-US" sz="1950" dirty="0" spc="1" kern="0">
+                <a:solidFill>
+                  <a:srgbClr val="F3EEE3"/>
+                </a:solidFill>
+                <a:latin typeface="Be Vietnam Pro" pitchFamily="34" charset="0"/>
+                <a:ea typeface="Be Vietnam Pro" pitchFamily="34" charset="-122"/>
+                <a:cs typeface="Be Vietnam Pro" pitchFamily="34" charset="-120"/>
+              </a:rPr>
+              <a:t>Sơ</a:t>
+            </a:r>
+            <a:r>
+              <a:rPr lang="en-US" sz="1950" dirty="0" spc="13" kern="0">
+                <a:solidFill>
+                  <a:srgbClr val="F3EEE3"/>
+                </a:solidFill>
+                <a:latin typeface="Be Vietnam Pro" pitchFamily="34" charset="0"/>
+                <a:ea typeface="Be Vietnam Pro" pitchFamily="34" charset="-122"/>
+                <a:cs typeface="Be Vietnam Pro" pitchFamily="34" charset="-120"/>
+              </a:rPr>
+              <a:t> đồ</a:t>
+            </a:r>
+            <a:r>
+              <a:rPr lang="en-US" sz="1950" dirty="0" spc="2" kern="0">
+                <a:solidFill>
+                  <a:srgbClr val="F3EEE3"/>
+                </a:solidFill>
+                <a:latin typeface="Be Vietnam Pro" pitchFamily="34" charset="0"/>
+                <a:ea typeface="Be Vietnam Pro" pitchFamily="34" charset="-122"/>
+                <a:cs typeface="Be Vietnam Pro" pitchFamily="34" charset="-120"/>
+              </a:rPr>
+              <a:t> nguồn, giản</a:t>
+            </a:r>
+            <a:r>
+              <a:rPr lang="en-US" sz="1950" dirty="0" spc="1" kern="0">
+                <a:solidFill>
+                  <a:srgbClr val="F3EEE3"/>
+                </a:solidFill>
+                <a:latin typeface="Be Vietnam Pro" pitchFamily="34" charset="0"/>
+                <a:ea typeface="Be Vietnam Pro" pitchFamily="34" charset="-122"/>
+                <a:cs typeface="Be Vietnam Pro" pitchFamily="34" charset="-120"/>
+              </a:rPr>
+              <a:t> lược:</a:t>
+            </a:r>
+            <a:r>
+              <a:rPr lang="en-US" sz="1950" dirty="0" spc="-9" kern="0">
+                <a:solidFill>
+                  <a:srgbClr val="F3EEE3"/>
+                </a:solidFill>
+                <a:latin typeface="Be Vietnam Pro" pitchFamily="34" charset="0"/>
+                <a:ea typeface="Be Vietnam Pro" pitchFamily="34" charset="-122"/>
+                <a:cs typeface="Be Vietnam Pro" pitchFamily="34" charset="-120"/>
+              </a:rPr>
+              <a:t> chuyển</a:t>
+            </a:r>
+            <a:r>
+              <a:rPr lang="en-US" sz="1950" dirty="0" spc="-22" kern="0">
                 <a:solidFill>
                   <a:srgbClr val="F3EEE3"/>
                 </a:solidFill>
@@ -8522,78 +8555,186 @@
           <a:lstStyle/>
           <a:p>
             <a:pPr algn="l" indent="0" marL="0">
+              <a:spcAft>
+                <a:spcPts val="300"/>
+              </a:spcAft>
               <a:buNone/>
             </a:pPr>
             <a:r>
+              <a:rPr lang="en-US" sz="2100" b="1" dirty="0" spc="2" kern="0">
+                <a:solidFill>
+                  <a:srgbClr val="F3EEE3"/>
+                </a:solidFill>
+                <a:latin typeface="Be Vietnam Pro" pitchFamily="34" charset="0"/>
+                <a:ea typeface="Be Vietnam Pro" pitchFamily="34" charset="-122"/>
+                <a:cs typeface="Be Vietnam Pro" pitchFamily="34" charset="-120"/>
+              </a:rPr>
+              <a:t>Sơ đồ</a:t>
+            </a:r>
+            <a:r>
+              <a:rPr lang="en-US" sz="2100" b="1" dirty="0" spc="-4" kern="0">
+                <a:solidFill>
+                  <a:srgbClr val="F3EEE3"/>
+                </a:solidFill>
+                <a:latin typeface="Be Vietnam Pro" pitchFamily="34" charset="0"/>
+                <a:ea typeface="Be Vietnam Pro" pitchFamily="34" charset="-122"/>
+                <a:cs typeface="Be Vietnam Pro" pitchFamily="34" charset="-120"/>
+              </a:rPr>
+              <a:t> nguồn,</a:t>
+            </a:r>
+            <a:r>
+              <a:rPr lang="en-US" sz="2100" b="1" dirty="0" spc="1" kern="0">
+                <a:solidFill>
+                  <a:srgbClr val="F3EEE3"/>
+                </a:solidFill>
+                <a:latin typeface="Be Vietnam Pro" pitchFamily="34" charset="0"/>
+                <a:ea typeface="Be Vietnam Pro" pitchFamily="34" charset="-122"/>
+                <a:cs typeface="Be Vietnam Pro" pitchFamily="34" charset="-120"/>
+              </a:rPr>
+              <a:t> giản</a:t>
+            </a:r>
+            <a:r>
+              <a:rPr lang="en-US" sz="2100" b="1" dirty="0" spc="7" kern="0">
+                <a:solidFill>
+                  <a:srgbClr val="F3EEE3"/>
+                </a:solidFill>
+                <a:latin typeface="Be Vietnam Pro" pitchFamily="34" charset="0"/>
+                <a:ea typeface="Be Vietnam Pro" pitchFamily="34" charset="-122"/>
+                <a:cs typeface="Be Vietnam Pro" pitchFamily="34" charset="-120"/>
+              </a:rPr>
+              <a:t> lược:</a:t>
+            </a:r>
+            <a:r>
+              <a:rPr lang="en-US" sz="2100" b="1" dirty="0" spc="-3" kern="0">
+                <a:solidFill>
+                  <a:srgbClr val="F3EEE3"/>
+                </a:solidFill>
+                <a:latin typeface="Be Vietnam Pro" pitchFamily="34" charset="0"/>
+                <a:ea typeface="Be Vietnam Pro" pitchFamily="34" charset="-122"/>
+                <a:cs typeface="Be Vietnam Pro" pitchFamily="34" charset="-120"/>
+              </a:rPr>
+              <a:t> ngân hàng</a:t>
+            </a:r>
+            <a:r>
+              <a:rPr lang="en-US" sz="2100" b="1" dirty="0" spc="-1" kern="0">
+                <a:solidFill>
+                  <a:srgbClr val="F3EEE3"/>
+                </a:solidFill>
+                <a:latin typeface="Be Vietnam Pro" pitchFamily="34" charset="0"/>
+                <a:ea typeface="Be Vietnam Pro" pitchFamily="34" charset="-122"/>
+                <a:cs typeface="Be Vietnam Pro" pitchFamily="34" charset="-120"/>
+              </a:rPr>
+              <a:t> cấp</a:t>
+            </a:r>
+            <a:r>
+              <a:rPr lang="en-US" sz="2100" b="1" dirty="0" spc="-17" kern="0">
+                <a:solidFill>
+                  <a:srgbClr val="F3EEE3"/>
+                </a:solidFill>
+                <a:latin typeface="Be Vietnam Pro" pitchFamily="34" charset="0"/>
+                <a:ea typeface="Be Vietnam Pro" pitchFamily="34" charset="-122"/>
+                <a:cs typeface="Be Vietnam Pro" pitchFamily="34" charset="-120"/>
+              </a:rPr>
+              <a:t> DAN.</a:t>
+            </a:r>
+            <a:endParaRPr lang="en-US" sz="2100" dirty="0"/>
+          </a:p>
+          <a:p>
+            <a:pPr algn="l" indent="0" marL="0">
+              <a:buNone/>
+            </a:pPr>
+            <a:r>
+              <a:rPr lang="en-US" sz="2100" b="1" dirty="0" spc="-3" kern="0">
+                <a:solidFill>
+                  <a:srgbClr val="FFB454"/>
+                </a:solidFill>
+                <a:latin typeface="Be Vietnam Pro" pitchFamily="34" charset="0"/>
+                <a:ea typeface="Be Vietnam Pro" pitchFamily="34" charset="-122"/>
+                <a:cs typeface="Be Vietnam Pro" pitchFamily="34" charset="-120"/>
+              </a:rPr>
+              <a:t>Hiện</a:t>
+            </a:r>
+            <a:r>
+              <a:rPr lang="en-US" sz="2100" b="1" dirty="0" spc="-7" kern="0">
+                <a:solidFill>
+                  <a:srgbClr val="FFB454"/>
+                </a:solidFill>
+                <a:latin typeface="Be Vietnam Pro" pitchFamily="34" charset="0"/>
+                <a:ea typeface="Be Vietnam Pro" pitchFamily="34" charset="-122"/>
+                <a:cs typeface="Be Vietnam Pro" pitchFamily="34" charset="-120"/>
+              </a:rPr>
+              <a:t> nay:</a:t>
+            </a:r>
+            <a:r>
+              <a:rPr lang="en-US" sz="2100" b="1" dirty="0" spc="-3" kern="0">
+                <a:solidFill>
+                  <a:srgbClr val="FFB454"/>
+                </a:solidFill>
+                <a:latin typeface="Be Vietnam Pro" pitchFamily="34" charset="0"/>
+                <a:ea typeface="Be Vietnam Pro" pitchFamily="34" charset="-122"/>
+                <a:cs typeface="Be Vietnam Pro" pitchFamily="34" charset="-120"/>
+              </a:rPr>
+              <a:t> qua</a:t>
+            </a:r>
+            <a:r>
               <a:rPr lang="en-US" sz="2100" b="1" dirty="0" spc="-5" kern="0">
                 <a:solidFill>
-                  <a:srgbClr val="F3EEE3"/>
-                </a:solidFill>
-                <a:latin typeface="Be Vietnam Pro" pitchFamily="34" charset="0"/>
-                <a:ea typeface="Be Vietnam Pro" pitchFamily="34" charset="-122"/>
-                <a:cs typeface="Be Vietnam Pro" pitchFamily="34" charset="-120"/>
-              </a:rPr>
-              <a:t>Ngân</a:t>
-            </a:r>
-            <a:r>
-              <a:rPr lang="en-US" sz="2100" b="1" dirty="0" spc="-3" kern="0">
-                <a:solidFill>
-                  <a:srgbClr val="F3EEE3"/>
-                </a:solidFill>
-                <a:latin typeface="Be Vietnam Pro" pitchFamily="34" charset="0"/>
-                <a:ea typeface="Be Vietnam Pro" pitchFamily="34" charset="-122"/>
-                <a:cs typeface="Be Vietnam Pro" pitchFamily="34" charset="-120"/>
-              </a:rPr>
-              <a:t> hàng</a:t>
-            </a:r>
-            <a:r>
-              <a:rPr lang="en-US" sz="2100" b="1" dirty="0" spc="6" kern="0">
-                <a:solidFill>
-                  <a:srgbClr val="F3EEE3"/>
-                </a:solidFill>
-                <a:latin typeface="Be Vietnam Pro" pitchFamily="34" charset="0"/>
-                <a:ea typeface="Be Vietnam Pro" pitchFamily="34" charset="-122"/>
-                <a:cs typeface="Be Vietnam Pro" pitchFamily="34" charset="-120"/>
-              </a:rPr>
-              <a:t> đã</a:t>
+                  <a:srgbClr val="FFB454"/>
+                </a:solidFill>
+                <a:latin typeface="Be Vietnam Pro" pitchFamily="34" charset="0"/>
+                <a:ea typeface="Be Vietnam Pro" pitchFamily="34" charset="-122"/>
+                <a:cs typeface="Be Vietnam Pro" pitchFamily="34" charset="-120"/>
+              </a:rPr>
+              <a:t> bên</a:t>
+            </a:r>
+            <a:r>
+              <a:rPr lang="en-US" sz="2100" b="1" dirty="0" spc="-1" kern="0">
+                <a:solidFill>
+                  <a:srgbClr val="FFB454"/>
+                </a:solidFill>
+                <a:latin typeface="Be Vietnam Pro" pitchFamily="34" charset="0"/>
+                <a:ea typeface="Be Vietnam Pro" pitchFamily="34" charset="-122"/>
+                <a:cs typeface="Be Vietnam Pro" pitchFamily="34" charset="-120"/>
+              </a:rPr>
+              <a:t> xử</a:t>
+            </a:r>
+            <a:r>
+              <a:rPr lang="en-US" sz="2100" b="1" dirty="0" spc="1" kern="0">
+                <a:solidFill>
+                  <a:srgbClr val="FFB454"/>
+                </a:solidFill>
+                <a:latin typeface="Be Vietnam Pro" pitchFamily="34" charset="0"/>
+                <a:ea typeface="Be Vietnam Pro" pitchFamily="34" charset="-122"/>
+                <a:cs typeface="Be Vietnam Pro" pitchFamily="34" charset="-120"/>
+              </a:rPr>
+              <a:t> lý</a:t>
             </a:r>
             <a:r>
               <a:rPr lang="en-US" sz="2100" b="1" dirty="0" spc="-2" kern="0">
                 <a:solidFill>
-                  <a:srgbClr val="F3EEE3"/>
-                </a:solidFill>
-                <a:latin typeface="Be Vietnam Pro" pitchFamily="34" charset="0"/>
-                <a:ea typeface="Be Vietnam Pro" pitchFamily="34" charset="-122"/>
-                <a:cs typeface="Be Vietnam Pro" pitchFamily="34" charset="-120"/>
-              </a:rPr>
-              <a:t> cấp</a:t>
-            </a:r>
-            <a:r>
-              <a:rPr lang="en-US" sz="2100" b="1" dirty="0" spc="-17" kern="0">
-                <a:solidFill>
-                  <a:srgbClr val="F3EEE3"/>
-                </a:solidFill>
-                <a:latin typeface="Be Vietnam Pro" pitchFamily="34" charset="0"/>
-                <a:ea typeface="Be Vietnam Pro" pitchFamily="34" charset="-122"/>
-                <a:cs typeface="Be Vietnam Pro" pitchFamily="34" charset="-120"/>
-              </a:rPr>
-              <a:t> DAN;</a:t>
-            </a:r>
-            <a:r>
-              <a:rPr lang="en-US" sz="2100" b="1" dirty="0" spc="-5" kern="0">
-                <a:solidFill>
-                  <a:srgbClr val="F3EEE3"/>
-                </a:solidFill>
-                <a:latin typeface="Be Vietnam Pro" pitchFamily="34" charset="0"/>
-                <a:ea typeface="Be Vietnam Pro" pitchFamily="34" charset="-122"/>
-                <a:cs typeface="Be Vietnam Pro" pitchFamily="34" charset="-120"/>
-              </a:rPr>
-              <a:t> Apple</a:t>
+                  <a:srgbClr val="FFB454"/>
+                </a:solidFill>
+                <a:latin typeface="Be Vietnam Pro" pitchFamily="34" charset="0"/>
+                <a:ea typeface="Be Vietnam Pro" pitchFamily="34" charset="-122"/>
+                <a:cs typeface="Be Vietnam Pro" pitchFamily="34" charset="-120"/>
+              </a:rPr>
+              <a:t> thanh</a:t>
+            </a:r>
+            <a:r>
+              <a:rPr lang="en-US" sz="2100" b="1" dirty="0" spc="-4" kern="0">
+                <a:solidFill>
+                  <a:srgbClr val="FFB454"/>
+                </a:solidFill>
+                <a:latin typeface="Be Vietnam Pro" pitchFamily="34" charset="0"/>
+                <a:ea typeface="Be Vietnam Pro" pitchFamily="34" charset="-122"/>
+                <a:cs typeface="Be Vietnam Pro" pitchFamily="34" charset="-120"/>
+              </a:rPr>
+              <a:t> toán,</a:t>
             </a:r>
             <a:r>
               <a:rPr lang="en-US" sz="2100" b="1" dirty="0" spc="-8" kern="0">
                 <a:solidFill>
-                  <a:srgbClr val="F3EEE3"/>
+                  <a:srgbClr val="FFB454"/>
                 </a:solidFill>
                 <a:latin typeface="Be Vietnam Pro" pitchFamily="34" charset="0"/>
                 <a:ea typeface="Be Vietnam Pro" pitchFamily="34" charset="-122"/>
@@ -8602,48 +8743,37 @@
               <a:t> không</a:t>
             </a:r>
             <a:r>
-              <a:rPr lang="en-US" sz="2100" b="1" dirty="0" spc="-3" kern="0">
-                <a:solidFill>
-                  <a:srgbClr val="F3EEE3"/>
-                </a:solidFill>
-                <a:latin typeface="Be Vietnam Pro" pitchFamily="34" charset="0"/>
-                <a:ea typeface="Be Vietnam Pro" pitchFamily="34" charset="-122"/>
-                <a:cs typeface="Be Vietnam Pro" pitchFamily="34" charset="-120"/>
-              </a:rPr>
-              <a:t> giữ</a:t>
-            </a:r>
-            <a:r>
-              <a:rPr lang="en-US" sz="2100" b="1" dirty="0" spc="-8" kern="0">
-                <a:solidFill>
-                  <a:srgbClr val="F3EEE3"/>
-                </a:solidFill>
-                <a:latin typeface="Be Vietnam Pro" pitchFamily="34" charset="0"/>
-                <a:ea typeface="Be Vietnam Pro" pitchFamily="34" charset="-122"/>
-                <a:cs typeface="Be Vietnam Pro" pitchFamily="34" charset="-120"/>
-              </a:rPr>
-              <a:t> thông</a:t>
+              <a:rPr lang="en-US" sz="2100" b="1" dirty="0" spc="36" kern="0">
+                <a:solidFill>
+                  <a:srgbClr val="FFB454"/>
+                </a:solidFill>
+                <a:latin typeface="Be Vietnam Pro" pitchFamily="34" charset="0"/>
+                <a:ea typeface="Be Vietnam Pro" pitchFamily="34" charset="-122"/>
+                <a:cs typeface="Be Vietnam Pro" pitchFamily="34" charset="-120"/>
+              </a:rPr>
+              <a:t> gửi</a:t>
+            </a:r>
+            <a:r>
+              <a:rPr lang="en-US" sz="2100" b="1" dirty="0" spc="-22" kern="0">
+                <a:solidFill>
+                  <a:srgbClr val="FFB454"/>
+                </a:solidFill>
+                <a:latin typeface="Be Vietnam Pro" pitchFamily="34" charset="0"/>
+                <a:ea typeface="Be Vietnam Pro" pitchFamily="34" charset="-122"/>
+                <a:cs typeface="Be Vietnam Pro" pitchFamily="34" charset="-120"/>
+              </a:rPr>
+              <a:t> DAN</a:t>
             </a:r>
             <a:r>
               <a:rPr lang="en-US" sz="2100" b="1" dirty="0" spc="-2" kern="0">
                 <a:solidFill>
-                  <a:srgbClr val="F3EEE3"/>
-                </a:solidFill>
-                <a:latin typeface="Be Vietnam Pro" pitchFamily="34" charset="0"/>
-                <a:ea typeface="Be Vietnam Pro" pitchFamily="34" charset="-122"/>
-                <a:cs typeface="Be Vietnam Pro" pitchFamily="34" charset="-120"/>
-              </a:rPr>
-              <a:t> tin</a:t>
-            </a:r>
-            <a:r>
-              <a:rPr lang="en-US" sz="2100" b="1" dirty="0" spc="-4" kern="0">
-                <a:solidFill>
-                  <a:srgbClr val="F3EEE3"/>
-                </a:solidFill>
-                <a:latin typeface="Be Vietnam Pro" pitchFamily="34" charset="0"/>
-                <a:ea typeface="Be Vietnam Pro" pitchFamily="34" charset="-122"/>
-                <a:cs typeface="Be Vietnam Pro" pitchFamily="34" charset="-120"/>
-              </a:rPr>
-              <a:t> thẻ.</a:t>
+                  <a:srgbClr val="FFB454"/>
+                </a:solidFill>
+                <a:latin typeface="Be Vietnam Pro" pitchFamily="34" charset="0"/>
+                <a:ea typeface="Be Vietnam Pro" pitchFamily="34" charset="-122"/>
+                <a:cs typeface="Be Vietnam Pro" pitchFamily="34" charset="-120"/>
+              </a:rPr>
+              <a:t> thẳng.</a:t>
             </a:r>
             <a:endParaRPr lang="en-US" sz="2100" dirty="0"/>
           </a:p>
@@ -9173,6 +9303,61 @@
               </a:rPr>
               <a:t> TOÁN</a:t>
             </a:r>
+            <a:r>
+              <a:rPr lang="en-US" sz="1800" b="1" spc="307" kern="0" dirty="0">
+                <a:solidFill>
+                  <a:srgbClr val="1F3FD1"/>
+                </a:solidFill>
+                <a:latin typeface="Be Vietnam Pro" pitchFamily="34" charset="0"/>
+                <a:ea typeface="Be Vietnam Pro" pitchFamily="34" charset="-122"/>
+                <a:cs typeface="Be Vietnam Pro" pitchFamily="34" charset="-120"/>
+              </a:rPr>
+              <a:t> (SƠ</a:t>
+            </a:r>
+            <a:r>
+              <a:rPr lang="en-US" sz="1800" b="1" spc="302" kern="0" dirty="0">
+                <a:solidFill>
+                  <a:srgbClr val="1F3FD1"/>
+                </a:solidFill>
+                <a:latin typeface="Be Vietnam Pro" pitchFamily="34" charset="0"/>
+                <a:ea typeface="Be Vietnam Pro" pitchFamily="34" charset="-122"/>
+                <a:cs typeface="Be Vietnam Pro" pitchFamily="34" charset="-120"/>
+              </a:rPr>
+              <a:t> ĐỒ</a:t>
+            </a:r>
+            <a:r>
+              <a:rPr lang="en-US" sz="1800" b="1" spc="300" kern="0" dirty="0">
+                <a:solidFill>
+                  <a:srgbClr val="1F3FD1"/>
+                </a:solidFill>
+                <a:latin typeface="Be Vietnam Pro" pitchFamily="34" charset="0"/>
+                <a:ea typeface="Be Vietnam Pro" pitchFamily="34" charset="-122"/>
+                <a:cs typeface="Be Vietnam Pro" pitchFamily="34" charset="-120"/>
+              </a:rPr>
+              <a:t> NGUỒN,</a:t>
+            </a:r>
+            <a:r>
+              <a:rPr lang="en-US" sz="1800" b="1" spc="298" kern="0" dirty="0">
+                <a:solidFill>
+                  <a:srgbClr val="1F3FD1"/>
+                </a:solidFill>
+                <a:latin typeface="Be Vietnam Pro" pitchFamily="34" charset="0"/>
+                <a:ea typeface="Be Vietnam Pro" pitchFamily="34" charset="-122"/>
+                <a:cs typeface="Be Vietnam Pro" pitchFamily="34" charset="-120"/>
+              </a:rPr>
+              <a:t> GIẢN</a:t>
+            </a:r>
+            <a:r>
+              <a:rPr lang="en-US" sz="1800" b="1" spc="302" kern="0" dirty="0">
+                <a:solidFill>
+                  <a:srgbClr val="1F3FD1"/>
+                </a:solidFill>
+                <a:latin typeface="Be Vietnam Pro" pitchFamily="34" charset="0"/>
+                <a:ea typeface="Be Vietnam Pro" pitchFamily="34" charset="-122"/>
+                <a:cs typeface="Be Vietnam Pro" pitchFamily="34" charset="-120"/>
+              </a:rPr>
+              <a:t> LƯỢC)</a:t>
+            </a:r>
             <a:endParaRPr lang="en-US" sz="1800" dirty="0"/>
           </a:p>
         </p:txBody>
@@ -10212,6 +10397,274 @@
         </p:nvSpPr>
         <p:spPr>
           <a:xfrm>
+            <a:off x="914400" y="7429500"/>
+            <a:ext cx="16459200" cy="1428750"/>
+          </a:xfrm>
+          <a:prstGeom prst="roundRect">
+            <a:avLst>
+              <a:gd name="adj" fmla="val 18667"/>
+            </a:avLst>
+          </a:prstGeom>
+          <a:solidFill>
+            <a:srgbClr val="CFE8E2"/>
+          </a:solidFill>
+          <a:ln/>
+        </p:spPr>
+      </p:sp>
+      <p:sp>
+        <p:nvSpPr>
+          <p:cNvPr id="25" name="Text 23"/>
+          <p:cNvSpPr/>
+          <p:nvPr/>
+        </p:nvSpPr>
+        <p:spPr>
+          <a:xfrm>
+            <a:off x="1295400" y="7429500"/>
+            <a:ext cx="15697200" cy="1428750"/>
+          </a:xfrm>
+          <a:prstGeom prst="rect">
+            <a:avLst/>
+          </a:prstGeom>
+          <a:noFill/>
+          <a:ln/>
+        </p:spPr>
+        <p:txBody>
+          <a:bodyPr wrap="square" lIns="0" tIns="0" rIns="0" bIns="0" rtlCol="0" anchor="ctr"/>
+          <a:lstStyle/>
+          <a:p>
+            <a:pPr algn="l" indent="0" marL="0">
+              <a:spcAft>
+                <a:spcPts val="450"/>
+              </a:spcAft>
+              <a:buNone/>
+            </a:pPr>
+            <a:r>
+              <a:rPr lang="en-US" sz="2400" b="1" dirty="0" spc="-7" kern="0">
+                <a:solidFill>
+                  <a:srgbClr val="14161C"/>
+                </a:solidFill>
+                <a:latin typeface="Be Vietnam Pro" pitchFamily="34" charset="0"/>
+                <a:ea typeface="Be Vietnam Pro" pitchFamily="34" charset="-122"/>
+                <a:cs typeface="Be Vietnam Pro" pitchFamily="34" charset="-120"/>
+              </a:rPr>
+              <a:t>Hiện</a:t>
+            </a:r>
+            <a:r>
+              <a:rPr lang="en-US" sz="2400" b="1" dirty="0" spc="-11" kern="0">
+                <a:solidFill>
+                  <a:srgbClr val="14161C"/>
+                </a:solidFill>
+                <a:latin typeface="Be Vietnam Pro" pitchFamily="34" charset="0"/>
+                <a:ea typeface="Be Vietnam Pro" pitchFamily="34" charset="-122"/>
+                <a:cs typeface="Be Vietnam Pro" pitchFamily="34" charset="-120"/>
+              </a:rPr>
+              <a:t> nay</a:t>
+            </a:r>
+            <a:r>
+              <a:rPr lang="en-US" sz="2400" b="1" dirty="0" spc="-13" kern="0">
+                <a:solidFill>
+                  <a:srgbClr val="14161C"/>
+                </a:solidFill>
+                <a:latin typeface="Be Vietnam Pro" pitchFamily="34" charset="0"/>
+                <a:ea typeface="Be Vietnam Pro" pitchFamily="34" charset="-122"/>
+                <a:cs typeface="Be Vietnam Pro" pitchFamily="34" charset="-120"/>
+              </a:rPr>
+              <a:t> trên</a:t>
+            </a:r>
+            <a:r>
+              <a:rPr lang="en-US" sz="2400" b="1" dirty="0" spc="-15" kern="0">
+                <a:solidFill>
+                  <a:srgbClr val="14161C"/>
+                </a:solidFill>
+                <a:latin typeface="Be Vietnam Pro" pitchFamily="34" charset="0"/>
+                <a:ea typeface="Be Vietnam Pro" pitchFamily="34" charset="-122"/>
+                <a:cs typeface="Be Vietnam Pro" pitchFamily="34" charset="-120"/>
+              </a:rPr>
+              <a:t> web:</a:t>
+            </a:r>
+            <a:r>
+              <a:rPr lang="en-US" sz="2400" b="1" dirty="0" spc="-3" kern="0">
+                <a:solidFill>
+                  <a:srgbClr val="14161C"/>
+                </a:solidFill>
+                <a:latin typeface="Be Vietnam Pro" pitchFamily="34" charset="0"/>
+                <a:ea typeface="Be Vietnam Pro" pitchFamily="34" charset="-122"/>
+                <a:cs typeface="Be Vietnam Pro" pitchFamily="34" charset="-120"/>
+              </a:rPr>
+              <a:t> mã</a:t>
+            </a:r>
+            <a:r>
+              <a:rPr lang="en-US" sz="2400" b="1" dirty="0" spc="-2" kern="0">
+                <a:solidFill>
+                  <a:srgbClr val="14161C"/>
+                </a:solidFill>
+                <a:latin typeface="Be Vietnam Pro" pitchFamily="34" charset="0"/>
+                <a:ea typeface="Be Vietnam Pro" pitchFamily="34" charset="-122"/>
+                <a:cs typeface="Be Vietnam Pro" pitchFamily="34" charset="-120"/>
+              </a:rPr>
+              <a:t> do</a:t>
+            </a:r>
+            <a:r>
+              <a:rPr lang="en-US" sz="2400" b="1" dirty="0" spc="-10" kern="0">
+                <a:solidFill>
+                  <a:srgbClr val="14161C"/>
+                </a:solidFill>
+                <a:latin typeface="Be Vietnam Pro" pitchFamily="34" charset="0"/>
+                <a:ea typeface="Be Vietnam Pro" pitchFamily="34" charset="-122"/>
+                <a:cs typeface="Be Vietnam Pro" pitchFamily="34" charset="-120"/>
+              </a:rPr>
+              <a:t> cổng</a:t>
+            </a:r>
+            <a:r>
+              <a:rPr lang="en-US" sz="2400" b="1" dirty="0" spc="-1" kern="0">
+                <a:solidFill>
+                  <a:srgbClr val="14161C"/>
+                </a:solidFill>
+                <a:latin typeface="Be Vietnam Pro" pitchFamily="34" charset="0"/>
+                <a:ea typeface="Be Vietnam Pro" pitchFamily="34" charset="-122"/>
+                <a:cs typeface="Be Vietnam Pro" pitchFamily="34" charset="-120"/>
+              </a:rPr>
+              <a:t> thanh</a:t>
+            </a:r>
+            <a:r>
+              <a:rPr lang="en-US" sz="2400" b="1" dirty="0" spc="-3" kern="0">
+                <a:solidFill>
+                  <a:srgbClr val="14161C"/>
+                </a:solidFill>
+                <a:latin typeface="Be Vietnam Pro" pitchFamily="34" charset="0"/>
+                <a:ea typeface="Be Vietnam Pro" pitchFamily="34" charset="-122"/>
+                <a:cs typeface="Be Vietnam Pro" pitchFamily="34" charset="-120"/>
+              </a:rPr>
+              <a:t> toán</a:t>
+            </a:r>
+            <a:r>
+              <a:rPr lang="en-US" sz="2400" b="1" dirty="0" spc="-9" kern="0">
+                <a:solidFill>
+                  <a:srgbClr val="14161C"/>
+                </a:solidFill>
+                <a:latin typeface="Be Vietnam Pro" pitchFamily="34" charset="0"/>
+                <a:ea typeface="Be Vietnam Pro" pitchFamily="34" charset="-122"/>
+                <a:cs typeface="Be Vietnam Pro" pitchFamily="34" charset="-120"/>
+              </a:rPr>
+              <a:t> phát ra.</a:t>
+            </a:r>
+            <a:endParaRPr lang="en-US" sz="2400" dirty="0"/>
+          </a:p>
+          <a:p>
+            <a:pPr algn="l" indent="0" marL="0">
+              <a:buNone/>
+            </a:pPr>
+            <a:r>
+              <a:rPr lang="en-US" sz="2400" b="1" dirty="0" spc="-9" kern="0">
+                <a:solidFill>
+                  <a:srgbClr val="14161C"/>
+                </a:solidFill>
+                <a:latin typeface="Be Vietnam Pro" pitchFamily="34" charset="0"/>
+                <a:ea typeface="Be Vietnam Pro" pitchFamily="34" charset="-122"/>
+                <a:cs typeface="Be Vietnam Pro" pitchFamily="34" charset="-120"/>
+              </a:rPr>
+              <a:t>Cổng</a:t>
+            </a:r>
+            <a:r>
+              <a:rPr lang="en-US" sz="2400" b="1" dirty="0" spc="-2" kern="0">
+                <a:solidFill>
+                  <a:srgbClr val="14161C"/>
+                </a:solidFill>
+                <a:latin typeface="Be Vietnam Pro" pitchFamily="34" charset="0"/>
+                <a:ea typeface="Be Vietnam Pro" pitchFamily="34" charset="-122"/>
+                <a:cs typeface="Be Vietnam Pro" pitchFamily="34" charset="-120"/>
+              </a:rPr>
+              <a:t> do</a:t>
+            </a:r>
+            <a:r>
+              <a:rPr lang="en-US" sz="2400" b="1" dirty="0" spc="-9" kern="0">
+                <a:solidFill>
+                  <a:srgbClr val="14161C"/>
+                </a:solidFill>
+                <a:latin typeface="Be Vietnam Pro" pitchFamily="34" charset="0"/>
+                <a:ea typeface="Be Vietnam Pro" pitchFamily="34" charset="-122"/>
+                <a:cs typeface="Be Vietnam Pro" pitchFamily="34" charset="-120"/>
+              </a:rPr>
+              <a:t> trang</a:t>
+            </a:r>
+            <a:r>
+              <a:rPr lang="en-US" sz="2400" b="1" dirty="0" spc="0" kern="0">
+                <a:solidFill>
+                  <a:srgbClr val="14161C"/>
+                </a:solidFill>
+                <a:latin typeface="Be Vietnam Pro" pitchFamily="34" charset="0"/>
+                <a:ea typeface="Be Vietnam Pro" pitchFamily="34" charset="-122"/>
+                <a:cs typeface="Be Vietnam Pro" pitchFamily="34" charset="-120"/>
+              </a:rPr>
+              <a:t> bán</a:t>
+            </a:r>
+            <a:r>
+              <a:rPr lang="en-US" sz="2400" b="1" dirty="0" spc="-5" kern="0">
+                <a:solidFill>
+                  <a:srgbClr val="14161C"/>
+                </a:solidFill>
+                <a:latin typeface="Be Vietnam Pro" pitchFamily="34" charset="0"/>
+                <a:ea typeface="Be Vietnam Pro" pitchFamily="34" charset="-122"/>
+                <a:cs typeface="Be Vietnam Pro" pitchFamily="34" charset="-120"/>
+              </a:rPr>
+              <a:t> hàng</a:t>
+            </a:r>
+            <a:r>
+              <a:rPr lang="en-US" sz="2400" b="1" dirty="0" spc="0" kern="0">
+                <a:solidFill>
+                  <a:srgbClr val="14161C"/>
+                </a:solidFill>
+                <a:latin typeface="Be Vietnam Pro" pitchFamily="34" charset="0"/>
+                <a:ea typeface="Be Vietnam Pro" pitchFamily="34" charset="-122"/>
+                <a:cs typeface="Be Vietnam Pro" pitchFamily="34" charset="-120"/>
+              </a:rPr>
+              <a:t> cấu hình,</a:t>
+            </a:r>
+            <a:r>
+              <a:rPr lang="en-US" sz="2400" b="1" dirty="0" spc="-8" kern="0">
+                <a:solidFill>
+                  <a:srgbClr val="14161C"/>
+                </a:solidFill>
+                <a:latin typeface="Be Vietnam Pro" pitchFamily="34" charset="0"/>
+                <a:ea typeface="Be Vietnam Pro" pitchFamily="34" charset="-122"/>
+                <a:cs typeface="Be Vietnam Pro" pitchFamily="34" charset="-120"/>
+              </a:rPr>
+              <a:t> không</a:t>
+            </a:r>
+            <a:r>
+              <a:rPr lang="en-US" sz="2400" b="1" dirty="0" spc="-22" kern="0">
+                <a:solidFill>
+                  <a:srgbClr val="14161C"/>
+                </a:solidFill>
+                <a:latin typeface="Be Vietnam Pro" pitchFamily="34" charset="0"/>
+                <a:ea typeface="Be Vietnam Pro" pitchFamily="34" charset="-122"/>
+                <a:cs typeface="Be Vietnam Pro" pitchFamily="34" charset="-120"/>
+              </a:rPr>
+              <a:t> về</a:t>
+            </a:r>
+            <a:r>
+              <a:rPr lang="en-US" sz="2400" b="1" dirty="0" spc="-4" kern="0">
+                <a:solidFill>
+                  <a:srgbClr val="14161C"/>
+                </a:solidFill>
+                <a:latin typeface="Be Vietnam Pro" pitchFamily="34" charset="0"/>
+                <a:ea typeface="Be Vietnam Pro" pitchFamily="34" charset="-122"/>
+                <a:cs typeface="Be Vietnam Pro" pitchFamily="34" charset="-120"/>
+              </a:rPr>
+              <a:t> Google.</a:t>
+            </a:r>
+            <a:endParaRPr lang="en-US" sz="2400" dirty="0"/>
+          </a:p>
+        </p:txBody>
+      </p:sp>
+      <p:sp>
+        <p:nvSpPr>
+          <p:cNvPr id="26" name="Shape 24"/>
+          <p:cNvSpPr/>
+          <p:nvPr/>
+        </p:nvSpPr>
+        <p:spPr>
+          <a:xfrm>
             <a:off x="15983712" y="9076331"/>
             <a:ext cx="1645920" cy="552301"/>
           </a:xfrm>
@@ -10230,7 +10683,7 @@
       </p:sp>
       <p:pic>
         <p:nvPicPr>
-          <p:cNvPr id="25" name="Moda image moda-export-watermark-d13a8119-32d3-4f05-aa88-15024fa808cc" descr="">    </p:cNvPr>
+          <p:cNvPr id="27" name="Moda image moda-export-watermark-d13a8119-32d3-4f05-aa88-15024fa808cc" descr="">    </p:cNvPr>
           <p:cNvPicPr>
             <a:picLocks noChangeAspect="1"/>
           </p:cNvPicPr>
@@ -11559,6 +12012,216 @@
         </p:nvSpPr>
         <p:spPr>
           <a:xfrm>
+            <a:off x="914400" y="7753350"/>
+            <a:ext cx="16459200" cy="1238250"/>
+          </a:xfrm>
+          <a:prstGeom prst="roundRect">
+            <a:avLst>
+              <a:gd name="adj" fmla="val 18462"/>
+            </a:avLst>
+          </a:prstGeom>
+          <a:solidFill>
+            <a:srgbClr val="1E212B"/>
+          </a:solidFill>
+          <a:ln/>
+        </p:spPr>
+      </p:sp>
+      <p:sp>
+        <p:nvSpPr>
+          <p:cNvPr id="28" name="Text 26"/>
+          <p:cNvSpPr/>
+          <p:nvPr/>
+        </p:nvSpPr>
+        <p:spPr>
+          <a:xfrm>
+            <a:off x="1295400" y="7753350"/>
+            <a:ext cx="4953000" cy="1238250"/>
+          </a:xfrm>
+          <a:prstGeom prst="rect">
+            <a:avLst/>
+          </a:prstGeom>
+          <a:noFill/>
+          <a:ln/>
+        </p:spPr>
+        <p:txBody>
+          <a:bodyPr wrap="square" lIns="0" tIns="0" rIns="0" bIns="0" rtlCol="0" anchor="ctr"/>
+          <a:lstStyle/>
+          <a:p>
+            <a:pPr algn="l" indent="0" marL="0">
+              <a:buNone/>
+            </a:pPr>
+            <a:r>
+              <a:rPr lang="en-US" sz="2250" b="1" dirty="0" spc="2" kern="0">
+                <a:solidFill>
+                  <a:srgbClr val="3DD6A0"/>
+                </a:solidFill>
+                <a:latin typeface="Be Vietnam Pro" pitchFamily="34" charset="0"/>
+                <a:ea typeface="Be Vietnam Pro" pitchFamily="34" charset="-122"/>
+                <a:cs typeface="Be Vietnam Pro" pitchFamily="34" charset="-120"/>
+              </a:rPr>
+              <a:t>Sơ</a:t>
+            </a:r>
+            <a:r>
+              <a:rPr lang="en-US" sz="2250" b="1" dirty="0" spc="10" kern="0">
+                <a:solidFill>
+                  <a:srgbClr val="3DD6A0"/>
+                </a:solidFill>
+                <a:latin typeface="Be Vietnam Pro" pitchFamily="34" charset="0"/>
+                <a:ea typeface="Be Vietnam Pro" pitchFamily="34" charset="-122"/>
+                <a:cs typeface="Be Vietnam Pro" pitchFamily="34" charset="-120"/>
+              </a:rPr>
+              <a:t> đồ</a:t>
+            </a:r>
+            <a:r>
+              <a:rPr lang="en-US" sz="2250" b="1" dirty="0" spc="-5" kern="0">
+                <a:solidFill>
+                  <a:srgbClr val="3DD6A0"/>
+                </a:solidFill>
+                <a:latin typeface="Be Vietnam Pro" pitchFamily="34" charset="0"/>
+                <a:ea typeface="Be Vietnam Pro" pitchFamily="34" charset="-122"/>
+                <a:cs typeface="Be Vietnam Pro" pitchFamily="34" charset="-120"/>
+              </a:rPr>
+              <a:t> nguồn</a:t>
+            </a:r>
+            <a:endParaRPr lang="en-US" sz="2250" dirty="0"/>
+          </a:p>
+        </p:txBody>
+      </p:sp>
+      <p:sp>
+        <p:nvSpPr>
+          <p:cNvPr id="29" name="Text 27"/>
+          <p:cNvSpPr/>
+          <p:nvPr/>
+        </p:nvSpPr>
+        <p:spPr>
+          <a:xfrm>
+            <a:off x="6667500" y="7753350"/>
+            <a:ext cx="10477500" cy="1238250"/>
+          </a:xfrm>
+          <a:prstGeom prst="rect">
+            <a:avLst/>
+          </a:prstGeom>
+          <a:noFill/>
+          <a:ln/>
+        </p:spPr>
+        <p:txBody>
+          <a:bodyPr wrap="square" lIns="0" tIns="0" rIns="0" bIns="0" rtlCol="0" anchor="ctr"/>
+          <a:lstStyle/>
+          <a:p>
+            <a:pPr algn="l" indent="0" marL="0">
+              <a:buNone/>
+            </a:pPr>
+            <a:r>
+              <a:rPr lang="en-US" sz="2250" dirty="0" spc="-3" kern="0">
+                <a:solidFill>
+                  <a:srgbClr val="F3EEE3"/>
+                </a:solidFill>
+                <a:latin typeface="Be Vietnam Pro" pitchFamily="34" charset="0"/>
+                <a:ea typeface="Be Vietnam Pro" pitchFamily="34" charset="-122"/>
+                <a:cs typeface="Be Vietnam Pro" pitchFamily="34" charset="-120"/>
+              </a:rPr>
+              <a:t>Giản</a:t>
+            </a:r>
+            <a:r>
+              <a:rPr lang="en-US" sz="2250" dirty="0" spc="8" kern="0">
+                <a:solidFill>
+                  <a:srgbClr val="F3EEE3"/>
+                </a:solidFill>
+                <a:latin typeface="Be Vietnam Pro" pitchFamily="34" charset="0"/>
+                <a:ea typeface="Be Vietnam Pro" pitchFamily="34" charset="-122"/>
+                <a:cs typeface="Be Vietnam Pro" pitchFamily="34" charset="-120"/>
+              </a:rPr>
+              <a:t> lược:</a:t>
+            </a:r>
+            <a:r>
+              <a:rPr lang="en-US" sz="2250" dirty="0" spc="1" kern="0">
+                <a:solidFill>
+                  <a:srgbClr val="F3EEE3"/>
+                </a:solidFill>
+                <a:latin typeface="Be Vietnam Pro" pitchFamily="34" charset="0"/>
+                <a:ea typeface="Be Vietnam Pro" pitchFamily="34" charset="-122"/>
+                <a:cs typeface="Be Vietnam Pro" pitchFamily="34" charset="-120"/>
+              </a:rPr>
+              <a:t> luồng</a:t>
+            </a:r>
+            <a:r>
+              <a:rPr lang="en-US" sz="2250" dirty="0" spc="-1" kern="0">
+                <a:solidFill>
+                  <a:srgbClr val="F3EEE3"/>
+                </a:solidFill>
+                <a:latin typeface="Be Vietnam Pro" pitchFamily="34" charset="0"/>
+                <a:ea typeface="Be Vietnam Pro" pitchFamily="34" charset="-122"/>
+                <a:cs typeface="Be Vietnam Pro" pitchFamily="34" charset="-120"/>
+              </a:rPr>
+              <a:t> hiện</a:t>
+            </a:r>
+            <a:r>
+              <a:rPr lang="en-US" sz="2250" dirty="0" spc="-8" kern="0">
+                <a:solidFill>
+                  <a:srgbClr val="F3EEE3"/>
+                </a:solidFill>
+                <a:latin typeface="Be Vietnam Pro" pitchFamily="34" charset="0"/>
+                <a:ea typeface="Be Vietnam Pro" pitchFamily="34" charset="-122"/>
+                <a:cs typeface="Be Vietnam Pro" pitchFamily="34" charset="-120"/>
+              </a:rPr>
+              <a:t> nay</a:t>
+            </a:r>
+            <a:r>
+              <a:rPr lang="en-US" sz="2250" dirty="0" spc="2" kern="0">
+                <a:solidFill>
+                  <a:srgbClr val="F3EEE3"/>
+                </a:solidFill>
+                <a:latin typeface="Be Vietnam Pro" pitchFamily="34" charset="0"/>
+                <a:ea typeface="Be Vietnam Pro" pitchFamily="34" charset="-122"/>
+                <a:cs typeface="Be Vietnam Pro" pitchFamily="34" charset="-120"/>
+              </a:rPr>
+              <a:t> của</a:t>
+            </a:r>
+            <a:r>
+              <a:rPr lang="en-US" sz="2250" dirty="0" spc="-2" kern="0">
+                <a:solidFill>
+                  <a:srgbClr val="F3EEE3"/>
+                </a:solidFill>
+                <a:latin typeface="Be Vietnam Pro" pitchFamily="34" charset="0"/>
+                <a:ea typeface="Be Vietnam Pro" pitchFamily="34" charset="-122"/>
+                <a:cs typeface="Be Vietnam Pro" pitchFamily="34" charset="-120"/>
+              </a:rPr>
+              <a:t> hai</a:t>
+            </a:r>
+            <a:r>
+              <a:rPr lang="en-US" sz="2250" dirty="0" spc="-1" kern="0">
+                <a:solidFill>
+                  <a:srgbClr val="F3EEE3"/>
+                </a:solidFill>
+                <a:latin typeface="Be Vietnam Pro" pitchFamily="34" charset="0"/>
+                <a:ea typeface="Be Vietnam Pro" pitchFamily="34" charset="-122"/>
+                <a:cs typeface="Be Vietnam Pro" pitchFamily="34" charset="-120"/>
+              </a:rPr>
+              <a:t> ví</a:t>
+            </a:r>
+            <a:r>
+              <a:rPr lang="en-US" sz="2250" dirty="0" spc="1" kern="0">
+                <a:solidFill>
+                  <a:srgbClr val="F3EEE3"/>
+                </a:solidFill>
+                <a:latin typeface="Be Vietnam Pro" pitchFamily="34" charset="0"/>
+                <a:ea typeface="Be Vietnam Pro" pitchFamily="34" charset="-122"/>
+                <a:cs typeface="Be Vietnam Pro" pitchFamily="34" charset="-120"/>
+              </a:rPr>
+              <a:t> khác.</a:t>
+            </a:r>
+            <a:endParaRPr lang="en-US" sz="2250" dirty="0"/>
+          </a:p>
+        </p:txBody>
+      </p:sp>
+      <p:sp>
+        <p:nvSpPr>
+          <p:cNvPr id="30" name="Shape 28"/>
+          <p:cNvSpPr/>
+          <p:nvPr/>
+        </p:nvSpPr>
+        <p:spPr>
+          <a:xfrm>
             <a:off x="15983712" y="9076331"/>
             <a:ext cx="1645920" cy="552301"/>
           </a:xfrm>
@@ -11577,7 +12240,7 @@
       </p:sp>
       <p:pic>
         <p:nvPicPr>
-          <p:cNvPr id="28" name="Moda image moda-export-watermark-d57acb86-6a64-4faa-b5b7-6b06a4955cd3" descr="">    </p:cNvPr>
+          <p:cNvPr id="31" name="Moda image moda-export-watermark-d57acb86-6a64-4faa-b5b7-6b06a4955cd3" descr="">    </p:cNvPr>
           <p:cNvPicPr>
             <a:picLocks noChangeAspect="1"/>
           </p:cNvPicPr>
@@ -12062,37 +12725,70 @@
               <a:buNone/>
             </a:pPr>
             <a:r>
-              <a:rPr lang="en-US" sz="2550" b="1" dirty="0" spc="-5" kern="0">
-                <a:solidFill>
-                  <a:srgbClr val="F3EEE3"/>
-                </a:solidFill>
-                <a:latin typeface="Be Vietnam Pro" pitchFamily="34" charset="0"/>
-                <a:ea typeface="Be Vietnam Pro" pitchFamily="34" charset="-122"/>
-                <a:cs typeface="Be Vietnam Pro" pitchFamily="34" charset="-120"/>
-              </a:rPr>
-              <a:t>Mã</a:t>
-            </a:r>
-            <a:r>
-              <a:rPr lang="en-US" sz="2550" b="1" dirty="0" spc="-22" kern="0">
-                <a:solidFill>
-                  <a:srgbClr val="F3EEE3"/>
-                </a:solidFill>
-                <a:latin typeface="Be Vietnam Pro" pitchFamily="34" charset="0"/>
-                <a:ea typeface="Be Vietnam Pro" pitchFamily="34" charset="-122"/>
-                <a:cs typeface="Be Vietnam Pro" pitchFamily="34" charset="-120"/>
-              </a:rPr>
-              <a:t> DAN,</a:t>
-            </a:r>
-            <a:r>
-              <a:rPr lang="en-US" sz="2550" b="1" dirty="0" spc="-14" kern="0">
-                <a:solidFill>
-                  <a:srgbClr val="F3EEE3"/>
-                </a:solidFill>
-                <a:latin typeface="Be Vietnam Pro" pitchFamily="34" charset="0"/>
-                <a:ea typeface="Be Vietnam Pro" pitchFamily="34" charset="-122"/>
-                <a:cs typeface="Be Vietnam Pro" pitchFamily="34" charset="-120"/>
-              </a:rPr>
-              <a:t> chuyển</a:t>
+              <a:rPr lang="en-US" sz="2550" b="1" dirty="0" spc="-4" kern="0">
+                <a:solidFill>
+                  <a:srgbClr val="F3EEE3"/>
+                </a:solidFill>
+                <a:latin typeface="Be Vietnam Pro" pitchFamily="34" charset="0"/>
+                <a:ea typeface="Be Vietnam Pro" pitchFamily="34" charset="-122"/>
+                <a:cs typeface="Be Vietnam Pro" pitchFamily="34" charset="-120"/>
+              </a:rPr>
+              <a:t>Nguồn:</a:t>
+            </a:r>
+            <a:r>
+              <a:rPr lang="en-US" sz="2550" b="1" dirty="0" spc="-21" kern="0">
+                <a:solidFill>
+                  <a:srgbClr val="F3EEE3"/>
+                </a:solidFill>
+                <a:latin typeface="Be Vietnam Pro" pitchFamily="34" charset="0"/>
+                <a:ea typeface="Be Vietnam Pro" pitchFamily="34" charset="-122"/>
+                <a:cs typeface="Be Vietnam Pro" pitchFamily="34" charset="-120"/>
+              </a:rPr>
+              <a:t> DAN;</a:t>
+            </a:r>
+            <a:r>
+              <a:rPr lang="en-US" sz="2550" b="1" dirty="0" spc="11" kern="0">
+                <a:solidFill>
+                  <a:srgbClr val="F3EEE3"/>
+                </a:solidFill>
+                <a:latin typeface="Be Vietnam Pro" pitchFamily="34" charset="0"/>
+                <a:ea typeface="Be Vietnam Pro" pitchFamily="34" charset="-122"/>
+                <a:cs typeface="Be Vietnam Pro" pitchFamily="34" charset="-120"/>
+              </a:rPr>
+              <a:t> thực</a:t>
+            </a:r>
+            <a:r>
+              <a:rPr lang="en-US" sz="2550" b="1" dirty="0" spc="-6" kern="0">
+                <a:solidFill>
+                  <a:srgbClr val="F3EEE3"/>
+                </a:solidFill>
+                <a:latin typeface="Be Vietnam Pro" pitchFamily="34" charset="0"/>
+                <a:ea typeface="Be Vietnam Pro" pitchFamily="34" charset="-122"/>
+                <a:cs typeface="Be Vietnam Pro" pitchFamily="34" charset="-120"/>
+              </a:rPr>
+              <a:t> tế</a:t>
+            </a:r>
+            <a:r>
+              <a:rPr lang="en-US" sz="2550" b="1" dirty="0" spc="1" kern="0">
+                <a:solidFill>
+                  <a:srgbClr val="F3EEE3"/>
+                </a:solidFill>
+                <a:latin typeface="Be Vietnam Pro" pitchFamily="34" charset="0"/>
+                <a:ea typeface="Be Vietnam Pro" pitchFamily="34" charset="-122"/>
+                <a:cs typeface="Be Vietnam Pro" pitchFamily="34" charset="-120"/>
+              </a:rPr>
+              <a:t> qua</a:t>
+            </a:r>
+            <a:r>
+              <a:rPr lang="en-US" sz="2550" b="1" dirty="0" spc="-6" kern="0">
+                <a:solidFill>
+                  <a:srgbClr val="F3EEE3"/>
+                </a:solidFill>
+                <a:latin typeface="Be Vietnam Pro" pitchFamily="34" charset="0"/>
+                <a:ea typeface="Be Vietnam Pro" pitchFamily="34" charset="-122"/>
+                <a:cs typeface="Be Vietnam Pro" pitchFamily="34" charset="-120"/>
+              </a:rPr>
+              <a:t> bên</a:t>
             </a:r>
             <a:r>
               <a:rPr lang="en-US" sz="2550" b="1" dirty="0" spc="-1" kern="0">
@@ -12103,7 +12799,7 @@
                 <a:ea typeface="Be Vietnam Pro" pitchFamily="34" charset="-122"/>
                 <a:cs typeface="Be Vietnam Pro" pitchFamily="34" charset="-120"/>
               </a:rPr>
-              <a:t> thẳng</a:t>
+              <a:t> xử</a:t>
             </a:r>
             <a:r>
               <a:rPr lang="en-US" sz="2550" b="1" dirty="0" spc="-3" kern="0">
@@ -12114,18 +12810,18 @@
                 <a:ea typeface="Be Vietnam Pro" pitchFamily="34" charset="-122"/>
                 <a:cs typeface="Be Vietnam Pro" pitchFamily="34" charset="-120"/>
               </a:rPr>
-              <a:t> cho</a:t>
-            </a:r>
-            <a:r>
-              <a:rPr lang="en-US" sz="2550" b="1" dirty="0" spc="-4" kern="0">
-                <a:solidFill>
-                  <a:srgbClr val="F3EEE3"/>
-                </a:solidFill>
-                <a:latin typeface="Be Vietnam Pro" pitchFamily="34" charset="0"/>
-                <a:ea typeface="Be Vietnam Pro" pitchFamily="34" charset="-122"/>
-                <a:cs typeface="Be Vietnam Pro" pitchFamily="34" charset="-120"/>
-              </a:rPr>
-              <a:t> ngân</a:t>
+              <a:t> lý</a:t>
+            </a:r>
+            <a:r>
+              <a:rPr lang="en-US" sz="2550" b="1" dirty="0" spc="0" kern="0">
+                <a:solidFill>
+                  <a:srgbClr val="F3EEE3"/>
+                </a:solidFill>
+                <a:latin typeface="Be Vietnam Pro" pitchFamily="34" charset="0"/>
+                <a:ea typeface="Be Vietnam Pro" pitchFamily="34" charset="-122"/>
+                <a:cs typeface="Be Vietnam Pro" pitchFamily="34" charset="-120"/>
+              </a:rPr>
+              <a:t> thanh</a:t>
             </a:r>
             <a:r>
               <a:rPr lang="en-US" sz="2550" b="1" dirty="0" spc="-2" kern="0">
@@ -12136,7 +12832,7 @@
                 <a:ea typeface="Be Vietnam Pro" pitchFamily="34" charset="-122"/>
                 <a:cs typeface="Be Vietnam Pro" pitchFamily="34" charset="-120"/>
               </a:rPr>
-              <a:t> hàng.</a:t>
+              <a:t> toán.</a:t>
             </a:r>
             <a:endParaRPr lang="en-US" sz="2550" dirty="0"/>
           </a:p>
@@ -12427,15 +13123,26 @@
               <a:buNone/>
             </a:pPr>
             <a:r>
-              <a:rPr lang="en-US" sz="2550" b="1" dirty="0" spc="-15" kern="0">
-                <a:solidFill>
-                  <a:srgbClr val="F3EEE3"/>
-                </a:solidFill>
-                <a:latin typeface="Be Vietnam Pro" pitchFamily="34" charset="0"/>
-                <a:ea typeface="Be Vietnam Pro" pitchFamily="34" charset="-122"/>
-                <a:cs typeface="Be Vietnam Pro" pitchFamily="34" charset="-120"/>
-              </a:rPr>
-              <a:t>Máy</a:t>
+              <a:rPr lang="en-US" sz="2550" b="1" dirty="0" spc="-4" kern="0">
+                <a:solidFill>
+                  <a:srgbClr val="F3EEE3"/>
+                </a:solidFill>
+                <a:latin typeface="Be Vietnam Pro" pitchFamily="34" charset="0"/>
+                <a:ea typeface="Be Vietnam Pro" pitchFamily="34" charset="-122"/>
+                <a:cs typeface="Be Vietnam Pro" pitchFamily="34" charset="-120"/>
+              </a:rPr>
+              <a:t>Nguồn:</a:t>
+            </a:r>
+            <a:r>
+              <a:rPr lang="en-US" sz="2550" b="1" dirty="0" spc="-12" kern="0">
+                <a:solidFill>
+                  <a:srgbClr val="F3EEE3"/>
+                </a:solidFill>
+                <a:latin typeface="Be Vietnam Pro" pitchFamily="34" charset="0"/>
+                <a:ea typeface="Be Vietnam Pro" pitchFamily="34" charset="-122"/>
+                <a:cs typeface="Be Vietnam Pro" pitchFamily="34" charset="-120"/>
+              </a:rPr>
+              <a:t> máy</a:t>
             </a:r>
             <a:r>
               <a:rPr lang="en-US" sz="2550" b="1" dirty="0" spc="0" kern="0">
@@ -12449,51 +13156,51 @@
               <a:t> chủ</a:t>
             </a:r>
             <a:r>
+              <a:rPr lang="en-US" sz="2550" b="1" dirty="0" spc="-4" kern="0">
+                <a:solidFill>
+                  <a:srgbClr val="F3EEE3"/>
+                </a:solidFill>
+                <a:latin typeface="Be Vietnam Pro" pitchFamily="34" charset="0"/>
+                <a:ea typeface="Be Vietnam Pro" pitchFamily="34" charset="-122"/>
+                <a:cs typeface="Be Vietnam Pro" pitchFamily="34" charset="-120"/>
+              </a:rPr>
+              <a:t> Google</a:t>
+            </a:r>
+            <a:r>
+              <a:rPr lang="en-US" sz="2550" b="1" dirty="0" spc="-13" kern="0">
+                <a:solidFill>
+                  <a:srgbClr val="F3EEE3"/>
+                </a:solidFill>
+                <a:latin typeface="Be Vietnam Pro" pitchFamily="34" charset="0"/>
+                <a:ea typeface="Be Vietnam Pro" pitchFamily="34" charset="-122"/>
+                <a:cs typeface="Be Vietnam Pro" pitchFamily="34" charset="-120"/>
+              </a:rPr>
+              <a:t> tra,</a:t>
+            </a:r>
+            <a:r>
+              <a:rPr lang="en-US" sz="2550" b="1" dirty="0" spc="-14" kern="0">
+                <a:solidFill>
+                  <a:srgbClr val="F3EEE3"/>
+                </a:solidFill>
+                <a:latin typeface="Be Vietnam Pro" pitchFamily="34" charset="0"/>
+                <a:ea typeface="Be Vietnam Pro" pitchFamily="34" charset="-122"/>
+                <a:cs typeface="Be Vietnam Pro" pitchFamily="34" charset="-120"/>
+              </a:rPr>
+              <a:t> rồi</a:t>
+            </a:r>
+            <a:r>
+              <a:rPr lang="en-US" sz="2550" b="1" dirty="0" spc="-13" kern="0">
+                <a:solidFill>
+                  <a:srgbClr val="F3EEE3"/>
+                </a:solidFill>
+                <a:latin typeface="Be Vietnam Pro" pitchFamily="34" charset="0"/>
+                <a:ea typeface="Be Vietnam Pro" pitchFamily="34" charset="-122"/>
+                <a:cs typeface="Be Vietnam Pro" pitchFamily="34" charset="-120"/>
+              </a:rPr>
+              <a:t> chuyển</a:t>
+            </a:r>
+            <a:r>
               <a:rPr lang="en-US" sz="2550" b="1" dirty="0" spc="-5" kern="0">
-                <a:solidFill>
-                  <a:srgbClr val="F3EEE3"/>
-                </a:solidFill>
-                <a:latin typeface="Be Vietnam Pro" pitchFamily="34" charset="0"/>
-                <a:ea typeface="Be Vietnam Pro" pitchFamily="34" charset="-122"/>
-                <a:cs typeface="Be Vietnam Pro" pitchFamily="34" charset="-120"/>
-              </a:rPr>
-              <a:t> Google,</a:t>
-            </a:r>
-            <a:r>
-              <a:rPr lang="en-US" sz="2550" b="1" dirty="0" spc="-13" kern="0">
-                <a:solidFill>
-                  <a:srgbClr val="F3EEE3"/>
-                </a:solidFill>
-                <a:latin typeface="Be Vietnam Pro" pitchFamily="34" charset="0"/>
-                <a:ea typeface="Be Vietnam Pro" pitchFamily="34" charset="-122"/>
-                <a:cs typeface="Be Vietnam Pro" pitchFamily="34" charset="-120"/>
-              </a:rPr>
-              <a:t> rồi</a:t>
-            </a:r>
-            <a:r>
-              <a:rPr lang="en-US" sz="2550" b="1" dirty="0" spc="-14" kern="0">
-                <a:solidFill>
-                  <a:srgbClr val="F3EEE3"/>
-                </a:solidFill>
-                <a:latin typeface="Be Vietnam Pro" pitchFamily="34" charset="0"/>
-                <a:ea typeface="Be Vietnam Pro" pitchFamily="34" charset="-122"/>
-                <a:cs typeface="Be Vietnam Pro" pitchFamily="34" charset="-120"/>
-              </a:rPr>
-              <a:t> chuyển</a:t>
-            </a:r>
-            <a:r>
-              <a:rPr lang="en-US" sz="2550" b="1" dirty="0" spc="-2" kern="0">
-                <a:solidFill>
-                  <a:srgbClr val="F3EEE3"/>
-                </a:solidFill>
-                <a:latin typeface="Be Vietnam Pro" pitchFamily="34" charset="0"/>
-                <a:ea typeface="Be Vietnam Pro" pitchFamily="34" charset="-122"/>
-                <a:cs typeface="Be Vietnam Pro" pitchFamily="34" charset="-120"/>
-              </a:rPr>
-              <a:t> cho</a:t>
-            </a:r>
-            <a:r>
-              <a:rPr lang="en-US" sz="2550" b="1" dirty="0" spc="-4" kern="0">
                 <a:solidFill>
                   <a:srgbClr val="F3EEE3"/>
                 </a:solidFill>
@@ -12527,7 +13234,7 @@
         <p:spPr>
           <a:xfrm>
             <a:off x="914400" y="7905750"/>
-            <a:ext cx="16459200" cy="381000"/>
+            <a:ext cx="16459200" cy="762000"/>
           </a:xfrm>
           <a:prstGeom prst="rect">
             <a:avLst/>
@@ -12540,6 +13247,9 @@
           <a:lstStyle/>
           <a:p>
             <a:pPr algn="l" indent="0" marL="0">
+              <a:spcAft>
+                <a:spcPts val="300"/>
+              </a:spcAft>
               <a:buNone/>
             </a:pPr>
             <a:r>
@@ -12662,6 +13372,155 @@
                 <a:cs typeface="Be Vietnam Pro" pitchFamily="34" charset="-120"/>
               </a:rPr>
               <a:t> hàng.</a:t>
+            </a:r>
+            <a:endParaRPr lang="en-US" sz="1950" dirty="0"/>
+          </a:p>
+          <a:p>
+            <a:pPr algn="l" indent="0" marL="0">
+              <a:buNone/>
+            </a:pPr>
+            <a:r>
+              <a:rPr lang="en-US" sz="1950" dirty="0" spc="-1" kern="0">
+                <a:solidFill>
+                  <a:srgbClr val="6B6A66"/>
+                </a:solidFill>
+                <a:latin typeface="Be Vietnam Pro" pitchFamily="34" charset="0"/>
+                <a:ea typeface="Be Vietnam Pro" pitchFamily="34" charset="-122"/>
+                <a:cs typeface="Be Vietnam Pro" pitchFamily="34" charset="-120"/>
+              </a:rPr>
+              <a:t>Google</a:t>
+            </a:r>
+            <a:r>
+              <a:rPr lang="en-US" sz="1950" dirty="0" spc="-16" kern="0">
+                <a:solidFill>
+                  <a:srgbClr val="6B6A66"/>
+                </a:solidFill>
+                <a:latin typeface="Be Vietnam Pro" pitchFamily="34" charset="0"/>
+                <a:ea typeface="Be Vietnam Pro" pitchFamily="34" charset="-122"/>
+                <a:cs typeface="Be Vietnam Pro" pitchFamily="34" charset="-120"/>
+              </a:rPr>
+              <a:t> Pay</a:t>
+            </a:r>
+            <a:r>
+              <a:rPr lang="en-US" sz="1950" dirty="0" spc="-15" kern="0">
+                <a:solidFill>
+                  <a:srgbClr val="6B6A66"/>
+                </a:solidFill>
+                <a:latin typeface="Be Vietnam Pro" pitchFamily="34" charset="0"/>
+                <a:ea typeface="Be Vietnam Pro" pitchFamily="34" charset="-122"/>
+                <a:cs typeface="Be Vietnam Pro" pitchFamily="34" charset="-120"/>
+              </a:rPr>
+              <a:t> trên</a:t>
+            </a:r>
+            <a:r>
+              <a:rPr lang="en-US" sz="1950" dirty="0" spc="-11" kern="0">
+                <a:solidFill>
+                  <a:srgbClr val="6B6A66"/>
+                </a:solidFill>
+                <a:latin typeface="Be Vietnam Pro" pitchFamily="34" charset="0"/>
+                <a:ea typeface="Be Vietnam Pro" pitchFamily="34" charset="-122"/>
+                <a:cs typeface="Be Vietnam Pro" pitchFamily="34" charset="-120"/>
+              </a:rPr>
+              <a:t> web</a:t>
+            </a:r>
+            <a:r>
+              <a:rPr lang="en-US" sz="1950" dirty="0" spc="1" kern="0">
+                <a:solidFill>
+                  <a:srgbClr val="6B6A66"/>
+                </a:solidFill>
+                <a:latin typeface="Be Vietnam Pro" pitchFamily="34" charset="0"/>
+                <a:ea typeface="Be Vietnam Pro" pitchFamily="34" charset="-122"/>
+                <a:cs typeface="Be Vietnam Pro" pitchFamily="34" charset="-120"/>
+              </a:rPr>
+              <a:t> hiện</a:t>
+            </a:r>
+            <a:r>
+              <a:rPr lang="en-US" sz="1950" dirty="0" spc="-6" kern="0">
+                <a:solidFill>
+                  <a:srgbClr val="6B6A66"/>
+                </a:solidFill>
+                <a:latin typeface="Be Vietnam Pro" pitchFamily="34" charset="0"/>
+                <a:ea typeface="Be Vietnam Pro" pitchFamily="34" charset="-122"/>
+                <a:cs typeface="Be Vietnam Pro" pitchFamily="34" charset="-120"/>
+              </a:rPr>
+              <a:t> nay:</a:t>
+            </a:r>
+            <a:r>
+              <a:rPr lang="en-US" sz="1950" dirty="0" spc="1" kern="0">
+                <a:solidFill>
+                  <a:srgbClr val="6B6A66"/>
+                </a:solidFill>
+                <a:latin typeface="Be Vietnam Pro" pitchFamily="34" charset="0"/>
+                <a:ea typeface="Be Vietnam Pro" pitchFamily="34" charset="-122"/>
+                <a:cs typeface="Be Vietnam Pro" pitchFamily="34" charset="-120"/>
+              </a:rPr>
+              <a:t> mã</a:t>
+            </a:r>
+            <a:r>
+              <a:rPr lang="en-US" sz="1950" dirty="0" spc="-1" kern="0">
+                <a:solidFill>
+                  <a:srgbClr val="6B6A66"/>
+                </a:solidFill>
+                <a:latin typeface="Be Vietnam Pro" pitchFamily="34" charset="0"/>
+                <a:ea typeface="Be Vietnam Pro" pitchFamily="34" charset="-122"/>
+                <a:cs typeface="Be Vietnam Pro" pitchFamily="34" charset="-120"/>
+              </a:rPr>
+              <a:t> do</a:t>
+            </a:r>
+            <a:r>
+              <a:rPr lang="en-US" sz="1950" dirty="0" spc="0" kern="0">
+                <a:solidFill>
+                  <a:srgbClr val="6B6A66"/>
+                </a:solidFill>
+                <a:latin typeface="Be Vietnam Pro" pitchFamily="34" charset="0"/>
+                <a:ea typeface="Be Vietnam Pro" pitchFamily="34" charset="-122"/>
+                <a:cs typeface="Be Vietnam Pro" pitchFamily="34" charset="-120"/>
+              </a:rPr>
+              <a:t> cổng thanh</a:t>
+            </a:r>
+            <a:r>
+              <a:rPr lang="en-US" sz="1950" dirty="0" spc="-8" kern="0">
+                <a:solidFill>
+                  <a:srgbClr val="6B6A66"/>
+                </a:solidFill>
+                <a:latin typeface="Be Vietnam Pro" pitchFamily="34" charset="0"/>
+                <a:ea typeface="Be Vietnam Pro" pitchFamily="34" charset="-122"/>
+                <a:cs typeface="Be Vietnam Pro" pitchFamily="34" charset="-120"/>
+              </a:rPr>
+              <a:t> toán,</a:t>
+            </a:r>
+            <a:r>
+              <a:rPr lang="en-US" sz="1950" dirty="0" spc="0" kern="0">
+                <a:solidFill>
+                  <a:srgbClr val="6B6A66"/>
+                </a:solidFill>
+                <a:latin typeface="Be Vietnam Pro" pitchFamily="34" charset="0"/>
+                <a:ea typeface="Be Vietnam Pro" pitchFamily="34" charset="-122"/>
+                <a:cs typeface="Be Vietnam Pro" pitchFamily="34" charset="-120"/>
+              </a:rPr>
+              <a:t> không</a:t>
+            </a:r>
+            <a:r>
+              <a:rPr lang="en-US" sz="1950" dirty="0" spc="-14" kern="0">
+                <a:solidFill>
+                  <a:srgbClr val="6B6A66"/>
+                </a:solidFill>
+                <a:latin typeface="Be Vietnam Pro" pitchFamily="34" charset="0"/>
+                <a:ea typeface="Be Vietnam Pro" pitchFamily="34" charset="-122"/>
+                <a:cs typeface="Be Vietnam Pro" pitchFamily="34" charset="-120"/>
+              </a:rPr>
+              <a:t> về</a:t>
+            </a:r>
+            <a:r>
+              <a:rPr lang="en-US" sz="1950" dirty="0" spc="-2" kern="0">
+                <a:solidFill>
+                  <a:srgbClr val="6B6A66"/>
+                </a:solidFill>
+                <a:latin typeface="Be Vietnam Pro" pitchFamily="34" charset="0"/>
+                <a:ea typeface="Be Vietnam Pro" pitchFamily="34" charset="-122"/>
+                <a:cs typeface="Be Vietnam Pro" pitchFamily="34" charset="-120"/>
+              </a:rPr>
+              <a:t> Google.</a:t>
             </a:r>
             <a:endParaRPr lang="en-US" sz="1950" dirty="0"/>
           </a:p>

--- a/system-design-101/vi/lessons/sd-07-017/slides/sd-07-017.pptx
+++ b/system-design-101/vi/lessons/sd-07-017/slides/sd-07-017.pptx
@@ -5409,10 +5409,10 @@
                 <a:ea typeface="Bricolage Grotesque ExtraBold" pitchFamily="34" charset="-122"/>
                 <a:cs typeface="Bricolage Grotesque ExtraBold" pitchFamily="34" charset="-120"/>
               </a:rPr>
-              <a:t> không</a:t>
-            </a:r>
-            <a:r>
-              <a:rPr lang="en-US" sz="6900" dirty="0" spc="1" kern="0">
+              <a:t> không giữ</a:t>
+            </a:r>
+            <a:r>
+              <a:rPr lang="en-US" sz="6900" dirty="0" spc="2" kern="0">
                 <a:solidFill>
                   <a:srgbClr val="F3EEE3"/>
                 </a:solidFill>
@@ -5420,7 +5420,7 @@
                 <a:ea typeface="Bricolage Grotesque ExtraBold" pitchFamily="34" charset="-122"/>
                 <a:cs typeface="Bricolage Grotesque ExtraBold" pitchFamily="34" charset="-120"/>
               </a:rPr>
-              <a:t> lưu</a:t>
+              <a:t> số</a:t>
             </a:r>
             <a:r>
               <a:rPr lang="en-US" sz="6900" dirty="0" spc="3" kern="0">
@@ -5432,6 +5432,28 @@
                 <a:cs typeface="Bricolage Grotesque ExtraBold" pitchFamily="34" charset="-120"/>
               </a:rPr>
               <a:t> thẻ</a:t>
+            </a:r>
+            <a:r>
+              <a:rPr lang="en-US" sz="6900" dirty="0" spc="6" kern="0">
+                <a:solidFill>
+                  <a:srgbClr val="F3EEE3"/>
+                </a:solidFill>
+                <a:latin typeface="Bricolage Grotesque ExtraBold" pitchFamily="34" charset="0"/>
+                <a:ea typeface="Bricolage Grotesque ExtraBold" pitchFamily="34" charset="-122"/>
+                <a:cs typeface="Bricolage Grotesque ExtraBold" pitchFamily="34" charset="-120"/>
+              </a:rPr>
+              <a:t> đầy</a:t>
+            </a:r>
+            <a:r>
+              <a:rPr lang="en-US" sz="6900" dirty="0" spc="19" kern="0">
+                <a:solidFill>
+                  <a:srgbClr val="F3EEE3"/>
+                </a:solidFill>
+                <a:latin typeface="Bricolage Grotesque ExtraBold" pitchFamily="34" charset="0"/>
+                <a:ea typeface="Bricolage Grotesque ExtraBold" pitchFamily="34" charset="-122"/>
+                <a:cs typeface="Bricolage Grotesque ExtraBold" pitchFamily="34" charset="-120"/>
+              </a:rPr>
+              <a:t> đủ</a:t>
             </a:r>
             <a:endParaRPr lang="en-US" sz="6900" dirty="0"/>
           </a:p>
